--- a/instructor/slides/pptx/sections/03-arrays-and-core-operators.pptx
+++ b/instructor/slides/pptx/sections/03-arrays-and-core-operators.pptx
@@ -3741,8 +3741,8 @@
         </p:nvSpPr>
         <p:spPr>
           <a:xfrm>
-            <a:off x="640080" y="1920240"/>
-            <a:ext cx="10972800" cy="1463040"/>
+            <a:off x="640080" y="1828800"/>
+            <a:ext cx="6675120" cy="1645920"/>
           </a:xfrm>
           <a:prstGeom prst="rect">
             <a:avLst/>
@@ -3756,7 +3756,7 @@
           <a:lstStyle/>
           <a:p>
             <a:r>
-              <a:rPr sz="4400" b="1">
+              <a:rPr sz="4000" b="1">
                 <a:solidFill>
                   <a:srgbClr val="FFFFFF"/>
                 </a:solidFill>
@@ -3775,8 +3775,8 @@
         </p:nvSpPr>
         <p:spPr>
           <a:xfrm>
-            <a:off x="640080" y="3657600"/>
-            <a:ext cx="10789920" cy="1097280"/>
+            <a:off x="640080" y="3794760"/>
+            <a:ext cx="6675120" cy="1097280"/>
           </a:xfrm>
           <a:prstGeom prst="rect">
             <a:avLst/>
@@ -3790,7 +3790,7 @@
           <a:lstStyle/>
           <a:p>
             <a:r>
-              <a:rPr sz="2000" b="0">
+              <a:rPr sz="1800" b="0">
                 <a:solidFill>
                   <a:srgbClr val="B7CBDE"/>
                 </a:solidFill>
@@ -3801,6 +3801,30 @@
           </a:p>
         </p:txBody>
       </p:sp>
+      <p:pic>
+        <p:nvPicPr>
+          <p:cNvPr id="6" name="Picture 5" descr="dw-map-filter.jpg"/>
+          <p:cNvPicPr>
+            <a:picLocks noChangeAspect="1"/>
+          </p:cNvPicPr>
+          <p:nvPr/>
+        </p:nvPicPr>
+        <p:blipFill>
+          <a:blip r:embed="rId2"/>
+          <a:stretch>
+            <a:fillRect/>
+          </a:stretch>
+        </p:blipFill>
+        <p:spPr>
+          <a:xfrm>
+            <a:off x="7452360" y="1325880"/>
+            <a:ext cx="4160520" cy="4160520"/>
+          </a:xfrm>
+          <a:prstGeom prst="rect">
+            <a:avLst/>
+          </a:prstGeom>
+        </p:spPr>
+      </p:pic>
     </p:spTree>
   </p:cSld>
   <p:clrMapOvr>
@@ -3904,8 +3928,8 @@
         </p:nvSpPr>
         <p:spPr>
           <a:xfrm>
-            <a:off x="640080" y="685800"/>
-            <a:ext cx="10972800" cy="1463040"/>
+            <a:off x="640080" y="658368"/>
+            <a:ext cx="7863840" cy="1645920"/>
           </a:xfrm>
           <a:prstGeom prst="rect">
             <a:avLst/>
@@ -3919,7 +3943,7 @@
           <a:lstStyle/>
           <a:p>
             <a:r>
-              <a:rPr sz="3200" b="1">
+              <a:rPr sz="3000" b="1">
                 <a:solidFill>
                   <a:srgbClr val="FFFFFF"/>
                 </a:solidFill>
@@ -3938,8 +3962,8 @@
         </p:nvSpPr>
         <p:spPr>
           <a:xfrm>
-            <a:off x="777240" y="2286000"/>
-            <a:ext cx="10607040" cy="4754880"/>
+            <a:off x="777240" y="2331720"/>
+            <a:ext cx="7498079" cy="4754880"/>
           </a:xfrm>
           <a:prstGeom prst="rect">
             <a:avLst/>
@@ -3958,7 +3982,7 @@
               </a:spcAft>
             </a:pPr>
             <a:r>
-              <a:rPr sz="2400" b="0">
+              <a:rPr sz="2200" b="0">
                 <a:solidFill>
                   <a:srgbClr val="FFFFFF"/>
                 </a:solidFill>
@@ -3974,7 +3998,7 @@
               </a:spcAft>
             </a:pPr>
             <a:r>
-              <a:rPr sz="2400" b="0">
+              <a:rPr sz="2200" b="0">
                 <a:solidFill>
                   <a:srgbClr val="FFFFFF"/>
                 </a:solidFill>
@@ -3985,6 +4009,30 @@
           </a:p>
         </p:txBody>
       </p:sp>
+      <p:pic>
+        <p:nvPicPr>
+          <p:cNvPr id="6" name="Picture 5" descr="dw-objects.jpg"/>
+          <p:cNvPicPr>
+            <a:picLocks noChangeAspect="1"/>
+          </p:cNvPicPr>
+          <p:nvPr/>
+        </p:nvPicPr>
+        <p:blipFill>
+          <a:blip r:embed="rId2"/>
+          <a:stretch>
+            <a:fillRect/>
+          </a:stretch>
+        </p:blipFill>
+        <p:spPr>
+          <a:xfrm>
+            <a:off x="8732520" y="2057400"/>
+            <a:ext cx="2880360" cy="2880360"/>
+          </a:xfrm>
+          <a:prstGeom prst="rect">
+            <a:avLst/>
+          </a:prstGeom>
+        </p:spPr>
+      </p:pic>
     </p:spTree>
   </p:cSld>
   <p:clrMapOvr>
@@ -4088,8 +4136,8 @@
         </p:nvSpPr>
         <p:spPr>
           <a:xfrm>
-            <a:off x="640080" y="685800"/>
-            <a:ext cx="10972800" cy="1463040"/>
+            <a:off x="640080" y="658368"/>
+            <a:ext cx="7863840" cy="1645920"/>
           </a:xfrm>
           <a:prstGeom prst="rect">
             <a:avLst/>
@@ -4103,7 +4151,7 @@
           <a:lstStyle/>
           <a:p>
             <a:r>
-              <a:rPr sz="3200" b="1">
+              <a:rPr sz="3000" b="1">
                 <a:solidFill>
                   <a:srgbClr val="FFFFFF"/>
                 </a:solidFill>
@@ -4122,8 +4170,8 @@
         </p:nvSpPr>
         <p:spPr>
           <a:xfrm>
-            <a:off x="777240" y="2286000"/>
-            <a:ext cx="10607040" cy="4754880"/>
+            <a:off x="777240" y="2331720"/>
+            <a:ext cx="7498079" cy="4754880"/>
           </a:xfrm>
           <a:prstGeom prst="rect">
             <a:avLst/>
@@ -4142,7 +4190,7 @@
               </a:spcAft>
             </a:pPr>
             <a:r>
-              <a:rPr sz="2400" b="0">
+              <a:rPr sz="2200" b="0">
                 <a:solidFill>
                   <a:srgbClr val="FFFFFF"/>
                 </a:solidFill>
@@ -4158,7 +4206,7 @@
               </a:spcAft>
             </a:pPr>
             <a:r>
-              <a:rPr sz="2400" b="0">
+              <a:rPr sz="2200" b="0">
                 <a:solidFill>
                   <a:srgbClr val="FFFFFF"/>
                 </a:solidFill>
@@ -4169,6 +4217,30 @@
           </a:p>
         </p:txBody>
       </p:sp>
+      <p:pic>
+        <p:nvPicPr>
+          <p:cNvPr id="6" name="Picture 5" descr="dw-map-filter.jpg"/>
+          <p:cNvPicPr>
+            <a:picLocks noChangeAspect="1"/>
+          </p:cNvPicPr>
+          <p:nvPr/>
+        </p:nvPicPr>
+        <p:blipFill>
+          <a:blip r:embed="rId2"/>
+          <a:stretch>
+            <a:fillRect/>
+          </a:stretch>
+        </p:blipFill>
+        <p:spPr>
+          <a:xfrm>
+            <a:off x="8732520" y="2057400"/>
+            <a:ext cx="2880360" cy="2880360"/>
+          </a:xfrm>
+          <a:prstGeom prst="rect">
+            <a:avLst/>
+          </a:prstGeom>
+        </p:spPr>
+      </p:pic>
     </p:spTree>
   </p:cSld>
   <p:clrMapOvr>
@@ -4272,8 +4344,8 @@
         </p:nvSpPr>
         <p:spPr>
           <a:xfrm>
-            <a:off x="640080" y="685800"/>
-            <a:ext cx="10972800" cy="1463040"/>
+            <a:off x="640080" y="658368"/>
+            <a:ext cx="7863840" cy="1645920"/>
           </a:xfrm>
           <a:prstGeom prst="rect">
             <a:avLst/>
@@ -4287,7 +4359,7 @@
           <a:lstStyle/>
           <a:p>
             <a:r>
-              <a:rPr sz="3200" b="1">
+              <a:rPr sz="3000" b="1">
                 <a:solidFill>
                   <a:srgbClr val="FFFFFF"/>
                 </a:solidFill>
@@ -4306,8 +4378,8 @@
         </p:nvSpPr>
         <p:spPr>
           <a:xfrm>
-            <a:off x="777240" y="2286000"/>
-            <a:ext cx="10607040" cy="4754880"/>
+            <a:off x="777240" y="2331720"/>
+            <a:ext cx="7498079" cy="4754880"/>
           </a:xfrm>
           <a:prstGeom prst="rect">
             <a:avLst/>
@@ -4326,7 +4398,7 @@
               </a:spcAft>
             </a:pPr>
             <a:r>
-              <a:rPr sz="2400" b="0">
+              <a:rPr sz="2200" b="0">
                 <a:solidFill>
                   <a:srgbClr val="FFFFFF"/>
                 </a:solidFill>
@@ -4342,7 +4414,7 @@
               </a:spcAft>
             </a:pPr>
             <a:r>
-              <a:rPr sz="2400" b="0">
+              <a:rPr sz="2200" b="0">
                 <a:solidFill>
                   <a:srgbClr val="FFFFFF"/>
                 </a:solidFill>
@@ -4358,7 +4430,7 @@
               </a:spcAft>
             </a:pPr>
             <a:r>
-              <a:rPr sz="2400" b="0">
+              <a:rPr sz="2200" b="0">
                 <a:solidFill>
                   <a:srgbClr val="FFFFFF"/>
                 </a:solidFill>
@@ -4374,7 +4446,7 @@
               </a:spcAft>
             </a:pPr>
             <a:r>
-              <a:rPr sz="2400" b="0">
+              <a:rPr sz="2200" b="0">
                 <a:solidFill>
                   <a:srgbClr val="FFFFFF"/>
                 </a:solidFill>
@@ -4385,6 +4457,30 @@
           </a:p>
         </p:txBody>
       </p:sp>
+      <p:pic>
+        <p:nvPicPr>
+          <p:cNvPr id="6" name="Picture 5" descr="dw-map-filter.jpg"/>
+          <p:cNvPicPr>
+            <a:picLocks noChangeAspect="1"/>
+          </p:cNvPicPr>
+          <p:nvPr/>
+        </p:nvPicPr>
+        <p:blipFill>
+          <a:blip r:embed="rId2"/>
+          <a:stretch>
+            <a:fillRect/>
+          </a:stretch>
+        </p:blipFill>
+        <p:spPr>
+          <a:xfrm>
+            <a:off x="8732520" y="2057400"/>
+            <a:ext cx="2880360" cy="2880360"/>
+          </a:xfrm>
+          <a:prstGeom prst="rect">
+            <a:avLst/>
+          </a:prstGeom>
+        </p:spPr>
+      </p:pic>
     </p:spTree>
   </p:cSld>
   <p:clrMapOvr>
@@ -4488,8 +4584,8 @@
         </p:nvSpPr>
         <p:spPr>
           <a:xfrm>
-            <a:off x="640080" y="685800"/>
-            <a:ext cx="10972800" cy="1463040"/>
+            <a:off x="640080" y="658368"/>
+            <a:ext cx="7863840" cy="1645920"/>
           </a:xfrm>
           <a:prstGeom prst="rect">
             <a:avLst/>
@@ -4503,7 +4599,7 @@
           <a:lstStyle/>
           <a:p>
             <a:r>
-              <a:rPr sz="3200" b="1">
+              <a:rPr sz="3000" b="1">
                 <a:solidFill>
                   <a:srgbClr val="FFFFFF"/>
                 </a:solidFill>
@@ -4522,8 +4618,8 @@
         </p:nvSpPr>
         <p:spPr>
           <a:xfrm>
-            <a:off x="777240" y="2286000"/>
-            <a:ext cx="10607040" cy="4754880"/>
+            <a:off x="777240" y="2331720"/>
+            <a:ext cx="7498079" cy="4754880"/>
           </a:xfrm>
           <a:prstGeom prst="rect">
             <a:avLst/>
@@ -4542,7 +4638,7 @@
               </a:spcAft>
             </a:pPr>
             <a:r>
-              <a:rPr sz="2400" b="0">
+              <a:rPr sz="2200" b="0">
                 <a:solidFill>
                   <a:srgbClr val="FFFFFF"/>
                 </a:solidFill>
@@ -4558,7 +4654,7 @@
               </a:spcAft>
             </a:pPr>
             <a:r>
-              <a:rPr sz="2400" b="0">
+              <a:rPr sz="2200" b="0">
                 <a:solidFill>
                   <a:srgbClr val="FFFFFF"/>
                 </a:solidFill>
@@ -4569,6 +4665,30 @@
           </a:p>
         </p:txBody>
       </p:sp>
+      <p:pic>
+        <p:nvPicPr>
+          <p:cNvPr id="6" name="Picture 5" descr="dw-map-filter.jpg"/>
+          <p:cNvPicPr>
+            <a:picLocks noChangeAspect="1"/>
+          </p:cNvPicPr>
+          <p:nvPr/>
+        </p:nvPicPr>
+        <p:blipFill>
+          <a:blip r:embed="rId2"/>
+          <a:stretch>
+            <a:fillRect/>
+          </a:stretch>
+        </p:blipFill>
+        <p:spPr>
+          <a:xfrm>
+            <a:off x="8732520" y="2057400"/>
+            <a:ext cx="2880360" cy="2880360"/>
+          </a:xfrm>
+          <a:prstGeom prst="rect">
+            <a:avLst/>
+          </a:prstGeom>
+        </p:spPr>
+      </p:pic>
     </p:spTree>
   </p:cSld>
   <p:clrMapOvr>
@@ -4672,8 +4792,8 @@
         </p:nvSpPr>
         <p:spPr>
           <a:xfrm>
-            <a:off x="640080" y="685800"/>
-            <a:ext cx="10972800" cy="1463040"/>
+            <a:off x="640080" y="658368"/>
+            <a:ext cx="7863840" cy="1645920"/>
           </a:xfrm>
           <a:prstGeom prst="rect">
             <a:avLst/>
@@ -4687,7 +4807,7 @@
           <a:lstStyle/>
           <a:p>
             <a:r>
-              <a:rPr sz="3200" b="1">
+              <a:rPr sz="3000" b="1">
                 <a:solidFill>
                   <a:srgbClr val="FFFFFF"/>
                 </a:solidFill>
@@ -4706,8 +4826,8 @@
         </p:nvSpPr>
         <p:spPr>
           <a:xfrm>
-            <a:off x="777240" y="2286000"/>
-            <a:ext cx="10607040" cy="4754880"/>
+            <a:off x="777240" y="2331720"/>
+            <a:ext cx="7498079" cy="4754880"/>
           </a:xfrm>
           <a:prstGeom prst="rect">
             <a:avLst/>
@@ -4726,7 +4846,7 @@
               </a:spcAft>
             </a:pPr>
             <a:r>
-              <a:rPr sz="2400" b="0">
+              <a:rPr sz="2200" b="0">
                 <a:solidFill>
                   <a:srgbClr val="FFFFFF"/>
                 </a:solidFill>
@@ -4742,7 +4862,7 @@
               </a:spcAft>
             </a:pPr>
             <a:r>
-              <a:rPr sz="2400" b="0">
+              <a:rPr sz="2200" b="0">
                 <a:solidFill>
                   <a:srgbClr val="FFFFFF"/>
                 </a:solidFill>
@@ -4758,7 +4878,7 @@
               </a:spcAft>
             </a:pPr>
             <a:r>
-              <a:rPr sz="2400" b="0">
+              <a:rPr sz="2200" b="0">
                 <a:solidFill>
                   <a:srgbClr val="FFFFFF"/>
                 </a:solidFill>
@@ -4774,7 +4894,7 @@
               </a:spcAft>
             </a:pPr>
             <a:r>
-              <a:rPr sz="2400" b="0">
+              <a:rPr sz="2200" b="0">
                 <a:solidFill>
                   <a:srgbClr val="FFFFFF"/>
                 </a:solidFill>
@@ -4785,6 +4905,30 @@
           </a:p>
         </p:txBody>
       </p:sp>
+      <p:pic>
+        <p:nvPicPr>
+          <p:cNvPr id="6" name="Picture 5" descr="dw-interview.jpg"/>
+          <p:cNvPicPr>
+            <a:picLocks noChangeAspect="1"/>
+          </p:cNvPicPr>
+          <p:nvPr/>
+        </p:nvPicPr>
+        <p:blipFill>
+          <a:blip r:embed="rId2"/>
+          <a:stretch>
+            <a:fillRect/>
+          </a:stretch>
+        </p:blipFill>
+        <p:spPr>
+          <a:xfrm>
+            <a:off x="8732520" y="2057400"/>
+            <a:ext cx="2880360" cy="2880360"/>
+          </a:xfrm>
+          <a:prstGeom prst="rect">
+            <a:avLst/>
+          </a:prstGeom>
+        </p:spPr>
+      </p:pic>
     </p:spTree>
   </p:cSld>
   <p:clrMapOvr>
@@ -4888,8 +5032,8 @@
         </p:nvSpPr>
         <p:spPr>
           <a:xfrm>
-            <a:off x="640080" y="685800"/>
-            <a:ext cx="10972800" cy="1463040"/>
+            <a:off x="640080" y="658368"/>
+            <a:ext cx="7863840" cy="1645920"/>
           </a:xfrm>
           <a:prstGeom prst="rect">
             <a:avLst/>
@@ -4903,7 +5047,7 @@
           <a:lstStyle/>
           <a:p>
             <a:r>
-              <a:rPr sz="3200" b="1">
+              <a:rPr sz="3000" b="1">
                 <a:solidFill>
                   <a:srgbClr val="FFFFFF"/>
                 </a:solidFill>
@@ -4922,8 +5066,8 @@
         </p:nvSpPr>
         <p:spPr>
           <a:xfrm>
-            <a:off x="777240" y="2286000"/>
-            <a:ext cx="10607040" cy="4754880"/>
+            <a:off x="777240" y="2331720"/>
+            <a:ext cx="7498079" cy="4754880"/>
           </a:xfrm>
           <a:prstGeom prst="rect">
             <a:avLst/>
@@ -4942,7 +5086,7 @@
               </a:spcAft>
             </a:pPr>
             <a:r>
-              <a:rPr sz="2400" b="0">
+              <a:rPr sz="2200" b="0">
                 <a:solidFill>
                   <a:srgbClr val="FFFFFF"/>
                 </a:solidFill>
@@ -4953,6 +5097,30 @@
           </a:p>
         </p:txBody>
       </p:sp>
+      <p:pic>
+        <p:nvPicPr>
+          <p:cNvPr id="6" name="Picture 5" descr="dw-interview.jpg"/>
+          <p:cNvPicPr>
+            <a:picLocks noChangeAspect="1"/>
+          </p:cNvPicPr>
+          <p:nvPr/>
+        </p:nvPicPr>
+        <p:blipFill>
+          <a:blip r:embed="rId2"/>
+          <a:stretch>
+            <a:fillRect/>
+          </a:stretch>
+        </p:blipFill>
+        <p:spPr>
+          <a:xfrm>
+            <a:off x="8732520" y="2057400"/>
+            <a:ext cx="2880360" cy="2880360"/>
+          </a:xfrm>
+          <a:prstGeom prst="rect">
+            <a:avLst/>
+          </a:prstGeom>
+        </p:spPr>
+      </p:pic>
     </p:spTree>
   </p:cSld>
   <p:clrMapOvr>
@@ -5056,8 +5224,8 @@
         </p:nvSpPr>
         <p:spPr>
           <a:xfrm>
-            <a:off x="640080" y="685800"/>
-            <a:ext cx="10972800" cy="1463040"/>
+            <a:off x="640080" y="658368"/>
+            <a:ext cx="10972800" cy="1645920"/>
           </a:xfrm>
           <a:prstGeom prst="rect">
             <a:avLst/>
@@ -5071,7 +5239,7 @@
           <a:lstStyle/>
           <a:p>
             <a:r>
-              <a:rPr sz="3200" b="1">
+              <a:rPr sz="3000" b="1">
                 <a:solidFill>
                   <a:srgbClr val="FFFFFF"/>
                 </a:solidFill>
@@ -5369,8 +5537,8 @@
         </p:nvSpPr>
         <p:spPr>
           <a:xfrm>
-            <a:off x="640080" y="685800"/>
-            <a:ext cx="10972800" cy="1463040"/>
+            <a:off x="640080" y="658368"/>
+            <a:ext cx="7863840" cy="1645920"/>
           </a:xfrm>
           <a:prstGeom prst="rect">
             <a:avLst/>
@@ -5384,7 +5552,7 @@
           <a:lstStyle/>
           <a:p>
             <a:r>
-              <a:rPr sz="3200" b="1">
+              <a:rPr sz="3000" b="1">
                 <a:solidFill>
                   <a:srgbClr val="FFFFFF"/>
                 </a:solidFill>
@@ -5403,8 +5571,8 @@
         </p:nvSpPr>
         <p:spPr>
           <a:xfrm>
-            <a:off x="777240" y="2286000"/>
-            <a:ext cx="10607040" cy="4754880"/>
+            <a:off x="777240" y="2331720"/>
+            <a:ext cx="7498079" cy="4754880"/>
           </a:xfrm>
           <a:prstGeom prst="rect">
             <a:avLst/>
@@ -5423,7 +5591,7 @@
               </a:spcAft>
             </a:pPr>
             <a:r>
-              <a:rPr sz="2400" b="0">
+              <a:rPr sz="2200" b="0">
                 <a:solidFill>
                   <a:srgbClr val="FFFFFF"/>
                 </a:solidFill>
@@ -5439,7 +5607,7 @@
               </a:spcAft>
             </a:pPr>
             <a:r>
-              <a:rPr sz="2400" b="0">
+              <a:rPr sz="2200" b="0">
                 <a:solidFill>
                   <a:srgbClr val="FFFFFF"/>
                 </a:solidFill>
@@ -5455,7 +5623,7 @@
               </a:spcAft>
             </a:pPr>
             <a:r>
-              <a:rPr sz="2400" b="0">
+              <a:rPr sz="2200" b="0">
                 <a:solidFill>
                   <a:srgbClr val="FFFFFF"/>
                 </a:solidFill>
@@ -5471,7 +5639,7 @@
               </a:spcAft>
             </a:pPr>
             <a:r>
-              <a:rPr sz="2400" b="0">
+              <a:rPr sz="2200" b="0">
                 <a:solidFill>
                   <a:srgbClr val="FFFFFF"/>
                 </a:solidFill>
@@ -5482,6 +5650,30 @@
           </a:p>
         </p:txBody>
       </p:sp>
+      <p:pic>
+        <p:nvPicPr>
+          <p:cNvPr id="6" name="Picture 5" descr="dw-loop.jpg"/>
+          <p:cNvPicPr>
+            <a:picLocks noChangeAspect="1"/>
+          </p:cNvPicPr>
+          <p:nvPr/>
+        </p:nvPicPr>
+        <p:blipFill>
+          <a:blip r:embed="rId2"/>
+          <a:stretch>
+            <a:fillRect/>
+          </a:stretch>
+        </p:blipFill>
+        <p:spPr>
+          <a:xfrm>
+            <a:off x="8549640" y="1965960"/>
+            <a:ext cx="3108960" cy="3108960"/>
+          </a:xfrm>
+          <a:prstGeom prst="rect">
+            <a:avLst/>
+          </a:prstGeom>
+        </p:spPr>
+      </p:pic>
     </p:spTree>
   </p:cSld>
   <p:clrMapOvr>
